--- a/F4/f4_presentacion_grupo2.pptx
+++ b/F4/f4_presentacion_grupo2.pptx
@@ -5,7 +5,7 @@
     <p:sldMasterId id="2147483684" r:id="rId1"/>
   </p:sldMasterIdLst>
   <p:notesMasterIdLst>
-    <p:notesMasterId r:id="rId9"/>
+    <p:notesMasterId r:id="rId8"/>
   </p:notesMasterIdLst>
   <p:sldIdLst>
     <p:sldId id="2076137175" r:id="rId2"/>
@@ -13,8 +13,7 @@
     <p:sldId id="2076137359" r:id="rId4"/>
     <p:sldId id="2076137360" r:id="rId5"/>
     <p:sldId id="2076137338" r:id="rId6"/>
-    <p:sldId id="2076137353" r:id="rId7"/>
-    <p:sldId id="2076137352" r:id="rId8"/>
+    <p:sldId id="2076137352" r:id="rId7"/>
   </p:sldIdLst>
   <p:sldSz cx="12192000" cy="6858000"/>
   <p:notesSz cx="6858000" cy="9144000"/>
@@ -208,7 +207,7 @@
           </a:lstStyle>
           <a:p>
             <a:fld id="{B02B2D6A-D10B-4950-84AB-B76A76B41051}" type="datetimeFigureOut">
-              <a:t>10/1/2026</a:t>
+              <a:t>02-10-2026</a:t>
             </a:fld>
             <a:endParaRPr lang="es-ES"/>
           </a:p>
@@ -365,7 +364,7 @@
           </a:lstStyle>
           <a:p>
             <a:fld id="{D32D85B4-8D15-40BA-BE63-8F85761BC2A6}" type="slidenum">
-              <a:t>‹#›</a:t>
+              <a:t>‹Nº›</a:t>
             </a:fld>
             <a:endParaRPr lang="es-ES"/>
           </a:p>
@@ -960,7 +959,7 @@
           <a:p>
             <a:r>
               <a:rPr lang="es-MX"/>
-              <a:t>Estas mediciones corresponden al equipo y entorno de F3. groupby tardó unas 15,9 veces menos. La lectura selectiva redujo la memoria del DataFrame. El pico de tracemalloc fue mayor con groupby, pero no representa toda la memoria del proceso.</a:t>
+              <a:t>Cierre: retomar las tres preguntas y las unidades de cada resultado. La asociación entre región y maternidad menor de 20 años tuvo V de Cramér 0,036, pequeña pese al p-value bajo. Proponer ampliar la serie histórica y separar tendencia anual de estacionalidad.</a:t>
             </a:r>
             <a:endParaRPr lang="en-US"/>
           </a:p>
@@ -984,94 +983,6 @@
             <a:fld id="{D32D85B4-8D15-40BA-BE63-8F85761BC2A6}" type="slidenum">
               <a:rPr lang="en-US" smtClean="0"/>
               <a:t>6</a:t>
-            </a:fld>
-            <a:endParaRPr lang="en-US"/>
-          </a:p>
-        </p:txBody>
-      </p:sp>
-    </p:spTree>
-    <p:extLst>
-      <p:ext uri="{BB962C8B-B14F-4D97-AF65-F5344CB8AC3E}">
-        <p14:creationId xmlns:p14="http://schemas.microsoft.com/office/powerpoint/2010/main" val="1851894157"/>
-      </p:ext>
-    </p:extLst>
-  </p:cSld>
-  <p:clrMapOvr>
-    <a:masterClrMapping/>
-  </p:clrMapOvr>
-</p:notes>
-</file>
-
-<file path=ppt/notesSlides/notesSlide7.xml><?xml version="1.0" encoding="utf-8"?>
-<p:notes xmlns:a="http://schemas.openxmlformats.org/drawingml/2006/main" xmlns:r="http://schemas.openxmlformats.org/officeDocument/2006/relationships" xmlns:p="http://schemas.openxmlformats.org/presentationml/2006/main">
-  <p:cSld>
-    <p:spTree>
-      <p:nvGrpSpPr>
-        <p:cNvPr id="1" name=""/>
-        <p:cNvGrpSpPr/>
-        <p:nvPr/>
-      </p:nvGrpSpPr>
-      <p:grpSpPr>
-        <a:xfrm>
-          <a:off x="0" y="0"/>
-          <a:ext cx="0" cy="0"/>
-          <a:chOff x="0" y="0"/>
-          <a:chExt cx="0" cy="0"/>
-        </a:xfrm>
-      </p:grpSpPr>
-      <p:sp>
-        <p:nvSpPr>
-          <p:cNvPr id="2" name="Slide Image Placeholder 1"/>
-          <p:cNvSpPr>
-            <a:spLocks noGrp="1" noRot="1" noChangeAspect="1"/>
-          </p:cNvSpPr>
-          <p:nvPr>
-            <p:ph type="sldImg"/>
-          </p:nvPr>
-        </p:nvSpPr>
-        <p:spPr/>
-      </p:sp>
-      <p:sp>
-        <p:nvSpPr>
-          <p:cNvPr id="3" name="Notes Placeholder 2"/>
-          <p:cNvSpPr>
-            <a:spLocks noGrp="1"/>
-          </p:cNvSpPr>
-          <p:nvPr>
-            <p:ph type="body" idx="1"/>
-          </p:nvPr>
-        </p:nvSpPr>
-        <p:spPr/>
-        <p:txBody>
-          <a:bodyPr/>
-          <a:lstStyle/>
-          <a:p>
-            <a:r>
-              <a:rPr lang="es-MX"/>
-              <a:t>Cierre: retomar las tres preguntas y las unidades de cada resultado. La asociación entre región y maternidad menor de 20 años tuvo V de Cramér 0,036, pequeña pese al p-value bajo. Proponer ampliar la serie histórica y separar tendencia anual de estacionalidad.</a:t>
-            </a:r>
-            <a:endParaRPr lang="en-US"/>
-          </a:p>
-        </p:txBody>
-      </p:sp>
-      <p:sp>
-        <p:nvSpPr>
-          <p:cNvPr id="4" name="Slide Number Placeholder 3"/>
-          <p:cNvSpPr>
-            <a:spLocks noGrp="1"/>
-          </p:cNvSpPr>
-          <p:nvPr>
-            <p:ph type="sldNum" sz="quarter" idx="5"/>
-          </p:nvPr>
-        </p:nvSpPr>
-        <p:spPr/>
-        <p:txBody>
-          <a:bodyPr/>
-          <a:lstStyle/>
-          <a:p>
-            <a:fld id="{D32D85B4-8D15-40BA-BE63-8F85761BC2A6}" type="slidenum">
-              <a:rPr lang="en-US" smtClean="0"/>
-              <a:t>7</a:t>
             </a:fld>
             <a:endParaRPr lang="en-US"/>
           </a:p>
@@ -1221,7 +1132,7 @@
           <a:p>
             <a:fld id="{7DC156A5-B668-40B6-B68E-AFC99CB3A359}" type="datetimeFigureOut">
               <a:rPr lang="es-CL" smtClean="0"/>
-              <a:t>01-10-2026</a:t>
+              <a:t>02-10-2026</a:t>
             </a:fld>
             <a:endParaRPr lang="es-CL"/>
           </a:p>
@@ -1263,7 +1174,7 @@
           <a:p>
             <a:fld id="{524E32BF-339A-4FD7-AF2D-884DBB49ECE9}" type="slidenum">
               <a:rPr lang="es-CL" smtClean="0"/>
-              <a:t>‹#›</a:t>
+              <a:t>‹Nº›</a:t>
             </a:fld>
             <a:endParaRPr lang="es-CL"/>
           </a:p>
@@ -1391,7 +1302,7 @@
           <a:p>
             <a:fld id="{7DC156A5-B668-40B6-B68E-AFC99CB3A359}" type="datetimeFigureOut">
               <a:rPr lang="es-CL" smtClean="0"/>
-              <a:t>01-10-2026</a:t>
+              <a:t>02-10-2026</a:t>
             </a:fld>
             <a:endParaRPr lang="es-CL"/>
           </a:p>
@@ -1433,7 +1344,7 @@
           <a:p>
             <a:fld id="{524E32BF-339A-4FD7-AF2D-884DBB49ECE9}" type="slidenum">
               <a:rPr lang="es-CL" smtClean="0"/>
-              <a:t>‹#›</a:t>
+              <a:t>‹Nº›</a:t>
             </a:fld>
             <a:endParaRPr lang="es-CL"/>
           </a:p>
@@ -1571,7 +1482,7 @@
           <a:p>
             <a:fld id="{7DC156A5-B668-40B6-B68E-AFC99CB3A359}" type="datetimeFigureOut">
               <a:rPr lang="es-CL" smtClean="0"/>
-              <a:t>01-10-2026</a:t>
+              <a:t>02-10-2026</a:t>
             </a:fld>
             <a:endParaRPr lang="es-CL"/>
           </a:p>
@@ -1613,7 +1524,7 @@
           <a:p>
             <a:fld id="{524E32BF-339A-4FD7-AF2D-884DBB49ECE9}" type="slidenum">
               <a:rPr lang="es-CL" smtClean="0"/>
-              <a:t>‹#›</a:t>
+              <a:t>‹Nº›</a:t>
             </a:fld>
             <a:endParaRPr lang="es-CL"/>
           </a:p>
@@ -1741,7 +1652,7 @@
           <a:p>
             <a:fld id="{7DC156A5-B668-40B6-B68E-AFC99CB3A359}" type="datetimeFigureOut">
               <a:rPr lang="es-CL" smtClean="0"/>
-              <a:t>01-10-2026</a:t>
+              <a:t>02-10-2026</a:t>
             </a:fld>
             <a:endParaRPr lang="es-CL"/>
           </a:p>
@@ -1783,7 +1694,7 @@
           <a:p>
             <a:fld id="{524E32BF-339A-4FD7-AF2D-884DBB49ECE9}" type="slidenum">
               <a:rPr lang="es-CL" smtClean="0"/>
-              <a:t>‹#›</a:t>
+              <a:t>‹Nº›</a:t>
             </a:fld>
             <a:endParaRPr lang="es-CL"/>
           </a:p>
@@ -1987,7 +1898,7 @@
           <a:p>
             <a:fld id="{7DC156A5-B668-40B6-B68E-AFC99CB3A359}" type="datetimeFigureOut">
               <a:rPr lang="es-CL" smtClean="0"/>
-              <a:t>01-10-2026</a:t>
+              <a:t>02-10-2026</a:t>
             </a:fld>
             <a:endParaRPr lang="es-CL"/>
           </a:p>
@@ -2029,7 +1940,7 @@
           <a:p>
             <a:fld id="{524E32BF-339A-4FD7-AF2D-884DBB49ECE9}" type="slidenum">
               <a:rPr lang="es-CL" smtClean="0"/>
-              <a:t>‹#›</a:t>
+              <a:t>‹Nº›</a:t>
             </a:fld>
             <a:endParaRPr lang="es-CL"/>
           </a:p>
@@ -2219,7 +2130,7 @@
           <a:p>
             <a:fld id="{7DC156A5-B668-40B6-B68E-AFC99CB3A359}" type="datetimeFigureOut">
               <a:rPr lang="es-CL" smtClean="0"/>
-              <a:t>01-10-2026</a:t>
+              <a:t>02-10-2026</a:t>
             </a:fld>
             <a:endParaRPr lang="es-CL"/>
           </a:p>
@@ -2261,7 +2172,7 @@
           <a:p>
             <a:fld id="{524E32BF-339A-4FD7-AF2D-884DBB49ECE9}" type="slidenum">
               <a:rPr lang="es-CL" smtClean="0"/>
-              <a:t>‹#›</a:t>
+              <a:t>‹Nº›</a:t>
             </a:fld>
             <a:endParaRPr lang="es-CL"/>
           </a:p>
@@ -2586,7 +2497,7 @@
           <a:p>
             <a:fld id="{7DC156A5-B668-40B6-B68E-AFC99CB3A359}" type="datetimeFigureOut">
               <a:rPr lang="es-CL" smtClean="0"/>
-              <a:t>01-10-2026</a:t>
+              <a:t>02-10-2026</a:t>
             </a:fld>
             <a:endParaRPr lang="es-CL"/>
           </a:p>
@@ -2628,7 +2539,7 @@
           <a:p>
             <a:fld id="{524E32BF-339A-4FD7-AF2D-884DBB49ECE9}" type="slidenum">
               <a:rPr lang="es-CL" smtClean="0"/>
-              <a:t>‹#›</a:t>
+              <a:t>‹Nº›</a:t>
             </a:fld>
             <a:endParaRPr lang="es-CL"/>
           </a:p>
@@ -2704,7 +2615,7 @@
           <a:p>
             <a:fld id="{7DC156A5-B668-40B6-B68E-AFC99CB3A359}" type="datetimeFigureOut">
               <a:rPr lang="es-CL" smtClean="0"/>
-              <a:t>01-10-2026</a:t>
+              <a:t>02-10-2026</a:t>
             </a:fld>
             <a:endParaRPr lang="es-CL"/>
           </a:p>
@@ -2746,7 +2657,7 @@
           <a:p>
             <a:fld id="{524E32BF-339A-4FD7-AF2D-884DBB49ECE9}" type="slidenum">
               <a:rPr lang="es-CL" smtClean="0"/>
-              <a:t>‹#›</a:t>
+              <a:t>‹Nº›</a:t>
             </a:fld>
             <a:endParaRPr lang="es-CL"/>
           </a:p>
@@ -2799,7 +2710,7 @@
           <a:p>
             <a:fld id="{7DC156A5-B668-40B6-B68E-AFC99CB3A359}" type="datetimeFigureOut">
               <a:rPr lang="es-CL" smtClean="0"/>
-              <a:t>01-10-2026</a:t>
+              <a:t>02-10-2026</a:t>
             </a:fld>
             <a:endParaRPr lang="es-CL"/>
           </a:p>
@@ -2841,7 +2752,7 @@
           <a:p>
             <a:fld id="{524E32BF-339A-4FD7-AF2D-884DBB49ECE9}" type="slidenum">
               <a:rPr lang="es-CL" smtClean="0"/>
-              <a:t>‹#›</a:t>
+              <a:t>‹Nº›</a:t>
             </a:fld>
             <a:endParaRPr lang="es-CL"/>
           </a:p>
@@ -3076,7 +2987,7 @@
           <a:p>
             <a:fld id="{7DC156A5-B668-40B6-B68E-AFC99CB3A359}" type="datetimeFigureOut">
               <a:rPr lang="es-CL" smtClean="0"/>
-              <a:t>01-10-2026</a:t>
+              <a:t>02-10-2026</a:t>
             </a:fld>
             <a:endParaRPr lang="es-CL"/>
           </a:p>
@@ -3118,7 +3029,7 @@
           <a:p>
             <a:fld id="{524E32BF-339A-4FD7-AF2D-884DBB49ECE9}" type="slidenum">
               <a:rPr lang="es-CL" smtClean="0"/>
-              <a:t>‹#›</a:t>
+              <a:t>‹Nº›</a:t>
             </a:fld>
             <a:endParaRPr lang="es-CL"/>
           </a:p>
@@ -3333,7 +3244,7 @@
           <a:p>
             <a:fld id="{7DC156A5-B668-40B6-B68E-AFC99CB3A359}" type="datetimeFigureOut">
               <a:rPr lang="es-CL" smtClean="0"/>
-              <a:t>01-10-2026</a:t>
+              <a:t>02-10-2026</a:t>
             </a:fld>
             <a:endParaRPr lang="es-CL"/>
           </a:p>
@@ -3375,7 +3286,7 @@
           <a:p>
             <a:fld id="{524E32BF-339A-4FD7-AF2D-884DBB49ECE9}" type="slidenum">
               <a:rPr lang="es-CL" smtClean="0"/>
-              <a:t>‹#›</a:t>
+              <a:t>‹Nº›</a:t>
             </a:fld>
             <a:endParaRPr lang="es-CL"/>
           </a:p>
@@ -3546,7 +3457,7 @@
           <a:p>
             <a:fld id="{7DC156A5-B668-40B6-B68E-AFC99CB3A359}" type="datetimeFigureOut">
               <a:rPr lang="es-CL" smtClean="0"/>
-              <a:t>01-10-2026</a:t>
+              <a:t>02-10-2026</a:t>
             </a:fld>
             <a:endParaRPr lang="es-CL"/>
           </a:p>
@@ -3624,7 +3535,7 @@
           <a:p>
             <a:fld id="{524E32BF-339A-4FD7-AF2D-884DBB49ECE9}" type="slidenum">
               <a:rPr lang="es-CL" smtClean="0"/>
-              <a:t>‹#›</a:t>
+              <a:t>‹Nº›</a:t>
             </a:fld>
             <a:endParaRPr lang="es-CL"/>
           </a:p>
@@ -6056,435 +5967,6 @@
 </file>
 
 <file path=ppt/slides/slide6.xml><?xml version="1.0" encoding="utf-8"?>
-<p:sld xmlns:a="http://schemas.openxmlformats.org/drawingml/2006/main" xmlns:r="http://schemas.openxmlformats.org/officeDocument/2006/relationships" xmlns:p="http://schemas.openxmlformats.org/presentationml/2006/main">
-  <p:cSld>
-    <p:bg>
-      <p:bgPr>
-        <a:solidFill>
-          <a:schemeClr val="bg1"/>
-        </a:solidFill>
-        <a:effectLst/>
-      </p:bgPr>
-    </p:bg>
-    <p:spTree>
-      <p:nvGrpSpPr>
-        <p:cNvPr id="1" name=""/>
-        <p:cNvGrpSpPr/>
-        <p:nvPr/>
-      </p:nvGrpSpPr>
-      <p:grpSpPr>
-        <a:xfrm>
-          <a:off x="0" y="0"/>
-          <a:ext cx="0" cy="0"/>
-          <a:chOff x="0" y="0"/>
-          <a:chExt cx="0" cy="0"/>
-        </a:xfrm>
-      </p:grpSpPr>
-      <p:sp>
-        <p:nvSpPr>
-          <p:cNvPr id="5" name="Rectángulo 4">
-            <a:extLst>
-              <a:ext uri="{FF2B5EF4-FFF2-40B4-BE49-F238E27FC236}">
-                <a16:creationId xmlns:a16="http://schemas.microsoft.com/office/drawing/2014/main" id="{6199C253-ADD1-2B1F-2D90-1027D7E1F161}"/>
-              </a:ext>
-            </a:extLst>
-          </p:cNvPr>
-          <p:cNvSpPr/>
-          <p:nvPr/>
-        </p:nvSpPr>
-        <p:spPr>
-          <a:xfrm rot="16200000">
-            <a:off x="3418037" y="3835882"/>
-            <a:ext cx="4490448" cy="45719"/>
-          </a:xfrm>
-          <a:prstGeom prst="rect">
-            <a:avLst/>
-          </a:prstGeom>
-          <a:solidFill>
-            <a:schemeClr val="bg1">
-              <a:lumMod val="85000"/>
-            </a:schemeClr>
-          </a:solidFill>
-          <a:ln w="0">
-            <a:noFill/>
-          </a:ln>
-        </p:spPr>
-        <p:style>
-          <a:lnRef idx="2">
-            <a:schemeClr val="accent1">
-              <a:shade val="50000"/>
-            </a:schemeClr>
-          </a:lnRef>
-          <a:fillRef idx="1">
-            <a:schemeClr val="accent1"/>
-          </a:fillRef>
-          <a:effectRef idx="0">
-            <a:schemeClr val="accent1"/>
-          </a:effectRef>
-          <a:fontRef idx="minor">
-            <a:schemeClr val="lt1"/>
-          </a:fontRef>
-        </p:style>
-        <p:txBody>
-          <a:bodyPr rtlCol="0" anchor="ctr"/>
-          <a:lstStyle/>
-          <a:p>
-            <a:pPr algn="ctr"/>
-            <a:endParaRPr lang="es-CL"/>
-          </a:p>
-        </p:txBody>
-      </p:sp>
-      <p:grpSp>
-        <p:nvGrpSpPr>
-          <p:cNvPr id="6" name="Grupo 5">
-            <a:extLst>
-              <a:ext uri="{FF2B5EF4-FFF2-40B4-BE49-F238E27FC236}">
-                <a16:creationId xmlns:a16="http://schemas.microsoft.com/office/drawing/2014/main" id="{4E6FC7F7-3521-BB68-C3D3-9A491781D8B5}"/>
-              </a:ext>
-            </a:extLst>
-          </p:cNvPr>
-          <p:cNvGrpSpPr/>
-          <p:nvPr/>
-        </p:nvGrpSpPr>
-        <p:grpSpPr>
-          <a:xfrm>
-            <a:off x="302002" y="-206018"/>
-            <a:ext cx="11544754" cy="6812558"/>
-            <a:chOff x="302002" y="-206018"/>
-            <a:chExt cx="11544754" cy="6812558"/>
-          </a:xfrm>
-        </p:grpSpPr>
-        <p:sp>
-          <p:nvSpPr>
-            <p:cNvPr id="7" name="Rectángulo 6">
-              <a:extLst>
-                <a:ext uri="{FF2B5EF4-FFF2-40B4-BE49-F238E27FC236}">
-                  <a16:creationId xmlns:a16="http://schemas.microsoft.com/office/drawing/2014/main" id="{116602A7-55D7-5653-E0ED-CB5206D7FFCB}"/>
-                </a:ext>
-              </a:extLst>
-            </p:cNvPr>
-            <p:cNvSpPr/>
-            <p:nvPr/>
-          </p:nvSpPr>
-          <p:spPr>
-            <a:xfrm>
-              <a:off x="302002" y="907609"/>
-              <a:ext cx="11544754" cy="5698931"/>
-            </a:xfrm>
-            <a:prstGeom prst="rect">
-              <a:avLst/>
-            </a:prstGeom>
-            <a:noFill/>
-            <a:ln>
-              <a:solidFill>
-                <a:schemeClr val="bg1">
-                  <a:lumMod val="75000"/>
-                </a:schemeClr>
-              </a:solidFill>
-            </a:ln>
-          </p:spPr>
-          <p:style>
-            <a:lnRef idx="2">
-              <a:schemeClr val="accent1">
-                <a:shade val="50000"/>
-              </a:schemeClr>
-            </a:lnRef>
-            <a:fillRef idx="1">
-              <a:schemeClr val="accent1"/>
-            </a:fillRef>
-            <a:effectRef idx="0">
-              <a:schemeClr val="accent1"/>
-            </a:effectRef>
-            <a:fontRef idx="minor">
-              <a:schemeClr val="lt1"/>
-            </a:fontRef>
-          </p:style>
-          <p:txBody>
-            <a:bodyPr rtlCol="0" anchor="ctr"/>
-            <a:lstStyle/>
-            <a:p>
-              <a:pPr algn="ctr"/>
-              <a:endParaRPr lang="es-CL">
-                <a:latin typeface="Cambria" panose="02040503050406030204" pitchFamily="18" charset="0"/>
-                <a:ea typeface="Cambria" panose="02040503050406030204" pitchFamily="18" charset="0"/>
-              </a:endParaRPr>
-            </a:p>
-          </p:txBody>
-        </p:sp>
-        <p:grpSp>
-          <p:nvGrpSpPr>
-            <p:cNvPr id="8" name="Grupo 7">
-              <a:extLst>
-                <a:ext uri="{FF2B5EF4-FFF2-40B4-BE49-F238E27FC236}">
-                  <a16:creationId xmlns:a16="http://schemas.microsoft.com/office/drawing/2014/main" id="{F2D505FF-28DB-D50A-9433-9B23281FA2F9}"/>
-                </a:ext>
-              </a:extLst>
-            </p:cNvPr>
-            <p:cNvGrpSpPr/>
-            <p:nvPr/>
-          </p:nvGrpSpPr>
-          <p:grpSpPr>
-            <a:xfrm>
-              <a:off x="10266948" y="-206018"/>
-              <a:ext cx="1339576" cy="1716660"/>
-              <a:chOff x="10266948" y="-206018"/>
-              <a:chExt cx="1339576" cy="1716660"/>
-            </a:xfrm>
-          </p:grpSpPr>
-          <p:sp>
-            <p:nvSpPr>
-              <p:cNvPr id="10" name="Título 1">
-                <a:extLst>
-                  <a:ext uri="{FF2B5EF4-FFF2-40B4-BE49-F238E27FC236}">
-                    <a16:creationId xmlns:a16="http://schemas.microsoft.com/office/drawing/2014/main" id="{36DD721A-40AF-E3DC-A419-6A0CEF27D276}"/>
-                  </a:ext>
-                </a:extLst>
-              </p:cNvPr>
-              <p:cNvSpPr txBox="1">
-                <a:spLocks/>
-              </p:cNvSpPr>
-              <p:nvPr/>
-            </p:nvSpPr>
-            <p:spPr>
-              <a:xfrm>
-                <a:off x="10266948" y="-206018"/>
-                <a:ext cx="1339576" cy="1716660"/>
-              </a:xfrm>
-              <a:prstGeom prst="rect">
-                <a:avLst/>
-              </a:prstGeom>
-              <a:solidFill>
-                <a:srgbClr val="002060"/>
-              </a:solidFill>
-            </p:spPr>
-            <p:txBody>
-              <a:bodyPr vert="horz" lIns="91440" tIns="45720" rIns="91440" bIns="45720" rtlCol="0" anchor="ctr">
-                <a:normAutofit/>
-              </a:bodyPr>
-              <a:lstStyle>
-                <a:lvl1pPr algn="l" defTabSz="914400" rtl="0" eaLnBrk="1" latinLnBrk="0" hangingPunct="1">
-                  <a:lnSpc>
-                    <a:spcPct val="90000"/>
-                  </a:lnSpc>
-                  <a:spcBef>
-                    <a:spcPct val="0"/>
-                  </a:spcBef>
-                  <a:buNone/>
-                  <a:defRPr sz="4400" kern="1200">
-                    <a:solidFill>
-                      <a:schemeClr val="tx1"/>
-                    </a:solidFill>
-                    <a:latin typeface="+mj-lt"/>
-                    <a:ea typeface="+mj-ea"/>
-                    <a:cs typeface="+mj-cs"/>
-                  </a:defRPr>
-                </a:lvl1pPr>
-              </a:lstStyle>
-              <a:p>
-                <a:r>
-                  <a:rPr lang="es-ES" sz="2800" dirty="0">
-                    <a:solidFill>
-                      <a:srgbClr val="FFFFFF"/>
-                    </a:solidFill>
-                    <a:latin typeface="Calibri"/>
-                    <a:ea typeface="Calibri"/>
-                    <a:cs typeface="Calibri Light"/>
-                  </a:rPr>
-                  <a:t>  </a:t>
-                </a:r>
-                <a:endParaRPr lang="es-ES" sz="2800" dirty="0">
-                  <a:solidFill>
-                    <a:srgbClr val="FFFFFF"/>
-                  </a:solidFill>
-                  <a:latin typeface="Calibri"/>
-                  <a:ea typeface="Calibri"/>
-                </a:endParaRPr>
-              </a:p>
-            </p:txBody>
-          </p:sp>
-          <p:pic>
-            <p:nvPicPr>
-              <p:cNvPr id="12" name="Imagen 11">
-                <a:extLst>
-                  <a:ext uri="{FF2B5EF4-FFF2-40B4-BE49-F238E27FC236}">
-                    <a16:creationId xmlns:a16="http://schemas.microsoft.com/office/drawing/2014/main" id="{800BB6D5-BCF8-E8E5-9BF0-16A46BB78793}"/>
-                  </a:ext>
-                </a:extLst>
-              </p:cNvPr>
-              <p:cNvPicPr>
-                <a:picLocks noChangeAspect="1"/>
-              </p:cNvPicPr>
-              <p:nvPr/>
-            </p:nvPicPr>
-            <p:blipFill>
-              <a:blip r:embed="rId3"/>
-              <a:stretch>
-                <a:fillRect/>
-              </a:stretch>
-            </p:blipFill>
-            <p:spPr>
-              <a:xfrm>
-                <a:off x="10375523" y="394074"/>
-                <a:ext cx="1151092" cy="973350"/>
-              </a:xfrm>
-              <a:prstGeom prst="rect">
-                <a:avLst/>
-              </a:prstGeom>
-            </p:spPr>
-          </p:pic>
-        </p:grpSp>
-      </p:grpSp>
-      <p:sp>
-        <p:nvSpPr>
-          <p:cNvPr id="9" name="Title 8">
-            <a:extLst>
-              <a:ext uri="{FF2B5EF4-FFF2-40B4-BE49-F238E27FC236}">
-                <a16:creationId xmlns:a16="http://schemas.microsoft.com/office/drawing/2014/main" id="{5D25B269-F1BC-FEFB-FEC3-033A8A33BAC5}"/>
-              </a:ext>
-            </a:extLst>
-          </p:cNvPr>
-          <p:cNvSpPr>
-            <a:spLocks noGrp="1"/>
-          </p:cNvSpPr>
-          <p:nvPr>
-            <p:ph type="title"/>
-          </p:nvPr>
-        </p:nvSpPr>
-        <p:spPr/>
-        <p:txBody>
-          <a:bodyPr/>
-          <a:lstStyle/>
-          <a:p>
-            <a:endParaRPr lang="en-US"/>
-          </a:p>
-        </p:txBody>
-      </p:sp>
-      <p:sp>
-        <p:nvSpPr>
-          <p:cNvPr id="13" name="Content Placeholder 12">
-            <a:extLst>
-              <a:ext uri="{FF2B5EF4-FFF2-40B4-BE49-F238E27FC236}">
-                <a16:creationId xmlns:a16="http://schemas.microsoft.com/office/drawing/2014/main" id="{C2100BBB-CDAA-0C7C-77B0-BCFA8A0F8FEC}"/>
-              </a:ext>
-            </a:extLst>
-          </p:cNvPr>
-          <p:cNvSpPr>
-            <a:spLocks noGrp="1"/>
-          </p:cNvSpPr>
-          <p:nvPr>
-            <p:ph idx="1"/>
-          </p:nvPr>
-        </p:nvSpPr>
-        <p:spPr/>
-        <p:txBody>
-          <a:bodyPr/>
-          <a:lstStyle/>
-          <a:p>
-            <a:endParaRPr lang="en-US"/>
-          </a:p>
-        </p:txBody>
-      </p:sp>
-      <p:sp>
-        <p:nvSpPr>
-          <p:cNvPr id="14" name="TextBox 13">
-            <a:extLst>
-              <a:ext uri="{FF2B5EF4-FFF2-40B4-BE49-F238E27FC236}">
-                <a16:creationId xmlns:a16="http://schemas.microsoft.com/office/drawing/2014/main" id="{5D073F9F-A0A4-4BCC-3B16-DD8630301090}"/>
-              </a:ext>
-            </a:extLst>
-          </p:cNvPr>
-          <p:cNvSpPr txBox="1"/>
-          <p:nvPr/>
-        </p:nvSpPr>
-        <p:spPr>
-          <a:xfrm>
-            <a:off x="1981200" y="2679700"/>
-            <a:ext cx="3365500" cy="954107"/>
-          </a:xfrm>
-          <a:prstGeom prst="rect">
-            <a:avLst/>
-          </a:prstGeom>
-          <a:noFill/>
-        </p:spPr>
-        <p:txBody>
-          <a:bodyPr vert="horz" wrap="square" lIns="0" tIns="0" rIns="0" bIns="0" rtlCol="0">
-            <a:noAutofit/>
-          </a:bodyPr>
-          <a:lstStyle/>
-          <a:p>
-            <a:r>
-              <a:rPr lang="en-US" sz="2800">
-                <a:solidFill>
-                  <a:srgbClr val="002C6B"/>
-                </a:solidFill>
-                <a:latin typeface="Arial" panose="020B0604020202020204" pitchFamily="34" charset="0"/>
-              </a:rPr>
-              <a:t>EFICIENCIA
-Y CONTROLES</a:t>
-            </a:r>
-          </a:p>
-        </p:txBody>
-      </p:sp>
-      <p:sp>
-        <p:nvSpPr>
-          <p:cNvPr id="15" name="TextBox 14">
-            <a:extLst>
-              <a:ext uri="{FF2B5EF4-FFF2-40B4-BE49-F238E27FC236}">
-                <a16:creationId xmlns:a16="http://schemas.microsoft.com/office/drawing/2014/main" id="{6403F7A1-ED81-5393-03C1-8F77C97726E7}"/>
-              </a:ext>
-            </a:extLst>
-          </p:cNvPr>
-          <p:cNvSpPr txBox="1"/>
-          <p:nvPr/>
-        </p:nvSpPr>
-        <p:spPr>
-          <a:xfrm>
-            <a:off x="6108700" y="1676400"/>
-            <a:ext cx="5080000" cy="3016210"/>
-          </a:xfrm>
-          <a:prstGeom prst="rect">
-            <a:avLst/>
-          </a:prstGeom>
-          <a:noFill/>
-        </p:spPr>
-        <p:txBody>
-          <a:bodyPr vert="horz" wrap="square" lIns="0" tIns="0" rIns="0" bIns="0" rtlCol="0">
-            <a:noAutofit/>
-          </a:bodyPr>
-          <a:lstStyle/>
-          <a:p>
-            <a:r>
-              <a:rPr lang="en-US" sz="1900">
-                <a:solidFill>
-                  <a:srgbClr val="002C6B"/>
-                </a:solidFill>
-                <a:latin typeface="Arial" panose="020B0604020202020204" pitchFamily="34" charset="0"/>
-              </a:rPr>
-              <a:t>Indicador regional
-Bucle: 0,1423 s
-groupby: 0,0090 s
-Lectura del CSV
-25 columnas: 408,08 MB
-6 columnas: 127,30 MB
-Verificamos resultados equivalentes antes de medir.</a:t>
-            </a:r>
-          </a:p>
-        </p:txBody>
-      </p:sp>
-    </p:spTree>
-    <p:extLst>
-      <p:ext uri="{BB962C8B-B14F-4D97-AF65-F5344CB8AC3E}">
-        <p14:creationId xmlns:p14="http://schemas.microsoft.com/office/powerpoint/2010/main" val="1869833160"/>
-      </p:ext>
-    </p:extLst>
-  </p:cSld>
-  <p:clrMapOvr>
-    <a:masterClrMapping/>
-  </p:clrMapOvr>
-</p:sld>
-</file>
-
-<file path=ppt/slides/slide7.xml><?xml version="1.0" encoding="utf-8"?>
 <p:sld xmlns:a="http://schemas.openxmlformats.org/drawingml/2006/main" xmlns:r="http://schemas.openxmlformats.org/officeDocument/2006/relationships" xmlns:p="http://schemas.openxmlformats.org/presentationml/2006/main">
   <p:cSld>
     <p:bg>
